--- a/ТКИ_441_Хоптий_П_В_Буланый_С_Е_В8_ЛРОС_Дж_Лр1_ГПСЧ_СМЗИ.pptx
+++ b/ТКИ_441_Хоптий_П_В_Буланый_С_Е_В8_ЛРОС_Дж_Лр1_ГПСЧ_СМЗИ.pptx
@@ -649,6 +649,13 @@
           </p:nvPr>
         </p:nvSpPr>
         <p:spPr/>
+        <p:txBody>
+          <a:bodyPr/>
+          <a:lstStyle/>
+          <a:p>
+            <a:endParaRPr lang="ru-RU"/>
+          </a:p>
+        </p:txBody>
       </p:sp>
       <p:sp>
         <p:nvSpPr>
@@ -680,6 +687,13 @@
           </p:nvPr>
         </p:nvSpPr>
         <p:spPr/>
+        <p:txBody>
+          <a:bodyPr/>
+          <a:lstStyle/>
+          <a:p>
+            <a:endParaRPr lang="ru-RU"/>
+          </a:p>
+        </p:txBody>
       </p:sp>
     </p:spTree>
     <p:extLst>
@@ -722,6 +736,13 @@
           </p:nvPr>
         </p:nvSpPr>
         <p:spPr/>
+        <p:txBody>
+          <a:bodyPr/>
+          <a:lstStyle/>
+          <a:p>
+            <a:endParaRPr lang="ru-RU"/>
+          </a:p>
+        </p:txBody>
       </p:sp>
       <p:sp>
         <p:nvSpPr>
@@ -753,6 +774,13 @@
           </p:nvPr>
         </p:nvSpPr>
         <p:spPr/>
+        <p:txBody>
+          <a:bodyPr/>
+          <a:lstStyle/>
+          <a:p>
+            <a:endParaRPr lang="ru-RU"/>
+          </a:p>
+        </p:txBody>
       </p:sp>
     </p:spTree>
   </p:cSld>
@@ -790,6 +818,13 @@
           </p:nvPr>
         </p:nvSpPr>
         <p:spPr/>
+        <p:txBody>
+          <a:bodyPr/>
+          <a:lstStyle/>
+          <a:p>
+            <a:endParaRPr lang="ru-RU"/>
+          </a:p>
+        </p:txBody>
       </p:sp>
       <p:sp>
         <p:nvSpPr>
@@ -821,6 +856,13 @@
           </p:nvPr>
         </p:nvSpPr>
         <p:spPr/>
+        <p:txBody>
+          <a:bodyPr/>
+          <a:lstStyle/>
+          <a:p>
+            <a:endParaRPr lang="ru-RU"/>
+          </a:p>
+        </p:txBody>
       </p:sp>
     </p:spTree>
   </p:cSld>
@@ -858,6 +900,13 @@
           </p:nvPr>
         </p:nvSpPr>
         <p:spPr/>
+        <p:txBody>
+          <a:bodyPr/>
+          <a:lstStyle/>
+          <a:p>
+            <a:endParaRPr lang="ru-RU"/>
+          </a:p>
+        </p:txBody>
       </p:sp>
       <p:sp>
         <p:nvSpPr>
@@ -889,6 +938,13 @@
           </p:nvPr>
         </p:nvSpPr>
         <p:spPr/>
+        <p:txBody>
+          <a:bodyPr/>
+          <a:lstStyle/>
+          <a:p>
+            <a:endParaRPr lang="ru-RU"/>
+          </a:p>
+        </p:txBody>
       </p:sp>
     </p:spTree>
     <p:extLst>
@@ -931,6 +987,13 @@
           </p:nvPr>
         </p:nvSpPr>
         <p:spPr/>
+        <p:txBody>
+          <a:bodyPr/>
+          <a:lstStyle/>
+          <a:p>
+            <a:endParaRPr lang="ru-RU"/>
+          </a:p>
+        </p:txBody>
       </p:sp>
       <p:sp>
         <p:nvSpPr>
@@ -962,6 +1025,13 @@
           </p:nvPr>
         </p:nvSpPr>
         <p:spPr/>
+        <p:txBody>
+          <a:bodyPr/>
+          <a:lstStyle/>
+          <a:p>
+            <a:endParaRPr lang="ru-RU"/>
+          </a:p>
+        </p:txBody>
       </p:sp>
     </p:spTree>
   </p:cSld>
@@ -999,6 +1069,13 @@
           </p:nvPr>
         </p:nvSpPr>
         <p:spPr/>
+        <p:txBody>
+          <a:bodyPr/>
+          <a:lstStyle/>
+          <a:p>
+            <a:endParaRPr lang="ru-RU"/>
+          </a:p>
+        </p:txBody>
       </p:sp>
       <p:sp>
         <p:nvSpPr>
@@ -1030,6 +1107,13 @@
           </p:nvPr>
         </p:nvSpPr>
         <p:spPr/>
+        <p:txBody>
+          <a:bodyPr/>
+          <a:lstStyle/>
+          <a:p>
+            <a:endParaRPr lang="ru-RU"/>
+          </a:p>
+        </p:txBody>
       </p:sp>
     </p:spTree>
   </p:cSld>
@@ -19153,7 +19237,7 @@
         <p:spPr>
           <a:xfrm>
             <a:off x="210312" y="658368"/>
-            <a:ext cx="11338560" cy="5071709"/>
+            <a:ext cx="11338560" cy="4636719"/>
           </a:xfrm>
           <a:prstGeom prst="rect">
             <a:avLst/>
@@ -19270,7 +19354,7 @@
                 <a:ea typeface="Times New Roman"/>
                 <a:cs typeface="Times New Roman"/>
               </a:rPr>
-              <a:t>Влияющие биты меняют количество прохождение тестов. </a:t>
+              <a:t>Параметры «Влияющие биты»  и «Длина регистров» меняют количество прохождение тестов. </a:t>
             </a:r>
           </a:p>
           <a:p>
@@ -19290,32 +19374,23 @@
                 <a:ea typeface="Times New Roman"/>
                 <a:cs typeface="Times New Roman"/>
               </a:rPr>
-              <a:t>Длинна регистров меняет количество прохождение тестов. </a:t>
-            </a:r>
-            <a:endParaRPr lang="ru-RU" sz="2000" b="0" dirty="0">
-              <a:latin typeface="Times New Roman"/>
-              <a:ea typeface="Times New Roman"/>
-              <a:cs typeface="Times New Roman"/>
-            </a:endParaRPr>
-          </a:p>
-          <a:p>
-            <a:pPr marL="285750" indent="-285750" algn="just">
-              <a:lnSpc>
-                <a:spcPct val="108000"/>
-              </a:lnSpc>
-              <a:spcAft>
-                <a:spcPts val="800"/>
-              </a:spcAft>
-              <a:buFont typeface="Arial"/>
-              <a:buChar char="•"/>
-            </a:pPr>
+              <a:t>Число бит в длине регистров ставят верхнюю планку в количестве сгенерированных чисел. Если принять за </a:t>
+            </a:r>
+            <a:r>
+              <a:rPr lang="en-US" sz="2000" dirty="0">
+                <a:latin typeface="Times New Roman"/>
+                <a:ea typeface="Times New Roman"/>
+                <a:cs typeface="Times New Roman"/>
+              </a:rPr>
+              <a:t>n </a:t>
+            </a:r>
             <a:r>
               <a:rPr lang="ru-RU" sz="2000" dirty="0">
                 <a:latin typeface="Times New Roman"/>
                 <a:ea typeface="Times New Roman"/>
                 <a:cs typeface="Times New Roman"/>
               </a:rPr>
-              <a:t>В конечном итоге генератор всегда будет зацикливаться</a:t>
+              <a:t>– число бит длины регистров</a:t>
             </a:r>
             <a:r>
               <a:rPr lang="en-US" sz="2000" dirty="0">
@@ -19331,7 +19406,7 @@
                 <a:ea typeface="Times New Roman"/>
                 <a:cs typeface="Times New Roman"/>
               </a:rPr>
-              <a:t> если задать достаточно чисел. Но это можно отсрочить</a:t>
+              <a:t> то количество сгенерированных чисел не будет превышать 2 в степени </a:t>
             </a:r>
             <a:r>
               <a:rPr lang="en-US" sz="2000" dirty="0">
@@ -19339,7 +19414,7 @@
                 <a:ea typeface="Times New Roman"/>
                 <a:cs typeface="Times New Roman"/>
               </a:rPr>
-              <a:t>,</a:t>
+              <a:t>n</a:t>
             </a:r>
             <a:r>
               <a:rPr lang="ru-RU" sz="2000" dirty="0">
@@ -19347,23 +19422,7 @@
                 <a:ea typeface="Times New Roman"/>
                 <a:cs typeface="Times New Roman"/>
               </a:rPr>
-              <a:t> если брать большой длинны регистры. Еще лучше</a:t>
-            </a:r>
-            <a:r>
-              <a:rPr lang="en-US" sz="2000" dirty="0">
-                <a:latin typeface="Times New Roman"/>
-                <a:ea typeface="Times New Roman"/>
-                <a:cs typeface="Times New Roman"/>
-              </a:rPr>
-              <a:t>,</a:t>
-            </a:r>
-            <a:r>
-              <a:rPr lang="ru-RU" sz="2000" dirty="0">
-                <a:latin typeface="Times New Roman"/>
-                <a:ea typeface="Times New Roman"/>
-                <a:cs typeface="Times New Roman"/>
-              </a:rPr>
-              <a:t> если длинны регистров будут отличаться друг от друга.</a:t>
+              <a:t> независимо от значения других параметров.</a:t>
             </a:r>
           </a:p>
           <a:p>
